--- a/耶和華祝福滿滿.pptx
+++ b/耶和華祝福滿滿.pptx
@@ -155,7 +155,7 @@
           <a:lstStyle/>
           <a:p>
             <a:r>
-              <a:rPr lang="en-US" altLang="zh-TW" smtClean="0"/>
+              <a:rPr lang="en-US" altLang="zh-TW"/>
               <a:t>Click to edit Master title style</a:t>
             </a:r>
             <a:endParaRPr lang="zh-TW" altLang="en-US"/>
@@ -274,7 +274,7 @@
           </a:lstStyle>
           <a:p>
             <a:r>
-              <a:rPr lang="en-US" altLang="zh-TW" smtClean="0"/>
+              <a:rPr lang="en-US" altLang="zh-TW"/>
               <a:t>Click to edit Master subtitle style</a:t>
             </a:r>
             <a:endParaRPr lang="zh-TW" altLang="en-US"/>
@@ -298,7 +298,7 @@
           <a:p>
             <a:fld id="{2E7B2A7A-7F65-47EC-8A58-D22006E8A9BC}" type="datetimeFigureOut">
               <a:rPr lang="vi-VN" smtClean="0"/>
-              <a:t>03/09/2022</a:t>
+              <a:t>14/02/2026</a:t>
             </a:fld>
             <a:endParaRPr lang="vi-VN"/>
           </a:p>
@@ -392,7 +392,7 @@
           <a:lstStyle/>
           <a:p>
             <a:r>
-              <a:rPr lang="en-US" altLang="zh-TW" smtClean="0"/>
+              <a:rPr lang="en-US" altLang="zh-TW"/>
               <a:t>Click to edit Master title style</a:t>
             </a:r>
             <a:endParaRPr lang="zh-TW" altLang="en-US"/>
@@ -416,35 +416,35 @@
           <a:p>
             <a:pPr lvl="0"/>
             <a:r>
-              <a:rPr lang="en-US" altLang="zh-TW" smtClean="0"/>
+              <a:rPr lang="en-US" altLang="zh-TW"/>
               <a:t>Edit Master text styles</a:t>
             </a:r>
           </a:p>
           <a:p>
             <a:pPr lvl="1"/>
             <a:r>
-              <a:rPr lang="en-US" altLang="zh-TW" smtClean="0"/>
+              <a:rPr lang="en-US" altLang="zh-TW"/>
               <a:t>Second level</a:t>
             </a:r>
           </a:p>
           <a:p>
             <a:pPr lvl="2"/>
             <a:r>
-              <a:rPr lang="en-US" altLang="zh-TW" smtClean="0"/>
+              <a:rPr lang="en-US" altLang="zh-TW"/>
               <a:t>Third level</a:t>
             </a:r>
           </a:p>
           <a:p>
             <a:pPr lvl="3"/>
             <a:r>
-              <a:rPr lang="en-US" altLang="zh-TW" smtClean="0"/>
+              <a:rPr lang="en-US" altLang="zh-TW"/>
               <a:t>Fourth level</a:t>
             </a:r>
           </a:p>
           <a:p>
             <a:pPr lvl="4"/>
             <a:r>
-              <a:rPr lang="en-US" altLang="zh-TW" smtClean="0"/>
+              <a:rPr lang="en-US" altLang="zh-TW"/>
               <a:t>Fifth level</a:t>
             </a:r>
             <a:endParaRPr lang="zh-TW" altLang="en-US"/>
@@ -468,7 +468,7 @@
           <a:p>
             <a:fld id="{2E7B2A7A-7F65-47EC-8A58-D22006E8A9BC}" type="datetimeFigureOut">
               <a:rPr lang="vi-VN" smtClean="0"/>
-              <a:t>03/09/2022</a:t>
+              <a:t>14/02/2026</a:t>
             </a:fld>
             <a:endParaRPr lang="vi-VN"/>
           </a:p>
@@ -567,7 +567,7 @@
           <a:lstStyle/>
           <a:p>
             <a:r>
-              <a:rPr lang="en-US" altLang="zh-TW" smtClean="0"/>
+              <a:rPr lang="en-US" altLang="zh-TW"/>
               <a:t>Click to edit Master title style</a:t>
             </a:r>
             <a:endParaRPr lang="zh-TW" altLang="en-US"/>
@@ -596,35 +596,35 @@
           <a:p>
             <a:pPr lvl="0"/>
             <a:r>
-              <a:rPr lang="en-US" altLang="zh-TW" smtClean="0"/>
+              <a:rPr lang="en-US" altLang="zh-TW"/>
               <a:t>Edit Master text styles</a:t>
             </a:r>
           </a:p>
           <a:p>
             <a:pPr lvl="1"/>
             <a:r>
-              <a:rPr lang="en-US" altLang="zh-TW" smtClean="0"/>
+              <a:rPr lang="en-US" altLang="zh-TW"/>
               <a:t>Second level</a:t>
             </a:r>
           </a:p>
           <a:p>
             <a:pPr lvl="2"/>
             <a:r>
-              <a:rPr lang="en-US" altLang="zh-TW" smtClean="0"/>
+              <a:rPr lang="en-US" altLang="zh-TW"/>
               <a:t>Third level</a:t>
             </a:r>
           </a:p>
           <a:p>
             <a:pPr lvl="3"/>
             <a:r>
-              <a:rPr lang="en-US" altLang="zh-TW" smtClean="0"/>
+              <a:rPr lang="en-US" altLang="zh-TW"/>
               <a:t>Fourth level</a:t>
             </a:r>
           </a:p>
           <a:p>
             <a:pPr lvl="4"/>
             <a:r>
-              <a:rPr lang="en-US" altLang="zh-TW" smtClean="0"/>
+              <a:rPr lang="en-US" altLang="zh-TW"/>
               <a:t>Fifth level</a:t>
             </a:r>
             <a:endParaRPr lang="zh-TW" altLang="en-US"/>
@@ -648,7 +648,7 @@
           <a:p>
             <a:fld id="{2E7B2A7A-7F65-47EC-8A58-D22006E8A9BC}" type="datetimeFigureOut">
               <a:rPr lang="vi-VN" smtClean="0"/>
-              <a:t>03/09/2022</a:t>
+              <a:t>14/02/2026</a:t>
             </a:fld>
             <a:endParaRPr lang="vi-VN"/>
           </a:p>
@@ -742,7 +742,7 @@
           <a:lstStyle/>
           <a:p>
             <a:r>
-              <a:rPr lang="en-US" altLang="zh-TW" smtClean="0"/>
+              <a:rPr lang="en-US" altLang="zh-TW"/>
               <a:t>Click to edit Master title style</a:t>
             </a:r>
             <a:endParaRPr lang="zh-TW" altLang="en-US"/>
@@ -766,35 +766,35 @@
           <a:p>
             <a:pPr lvl="0"/>
             <a:r>
-              <a:rPr lang="en-US" altLang="zh-TW" smtClean="0"/>
+              <a:rPr lang="en-US" altLang="zh-TW"/>
               <a:t>Edit Master text styles</a:t>
             </a:r>
           </a:p>
           <a:p>
             <a:pPr lvl="1"/>
             <a:r>
-              <a:rPr lang="en-US" altLang="zh-TW" smtClean="0"/>
+              <a:rPr lang="en-US" altLang="zh-TW"/>
               <a:t>Second level</a:t>
             </a:r>
           </a:p>
           <a:p>
             <a:pPr lvl="2"/>
             <a:r>
-              <a:rPr lang="en-US" altLang="zh-TW" smtClean="0"/>
+              <a:rPr lang="en-US" altLang="zh-TW"/>
               <a:t>Third level</a:t>
             </a:r>
           </a:p>
           <a:p>
             <a:pPr lvl="3"/>
             <a:r>
-              <a:rPr lang="en-US" altLang="zh-TW" smtClean="0"/>
+              <a:rPr lang="en-US" altLang="zh-TW"/>
               <a:t>Fourth level</a:t>
             </a:r>
           </a:p>
           <a:p>
             <a:pPr lvl="4"/>
             <a:r>
-              <a:rPr lang="en-US" altLang="zh-TW" smtClean="0"/>
+              <a:rPr lang="en-US" altLang="zh-TW"/>
               <a:t>Fifth level</a:t>
             </a:r>
             <a:endParaRPr lang="zh-TW" altLang="en-US"/>
@@ -818,7 +818,7 @@
           <a:p>
             <a:fld id="{2E7B2A7A-7F65-47EC-8A58-D22006E8A9BC}" type="datetimeFigureOut">
               <a:rPr lang="vi-VN" smtClean="0"/>
-              <a:t>03/09/2022</a:t>
+              <a:t>14/02/2026</a:t>
             </a:fld>
             <a:endParaRPr lang="vi-VN"/>
           </a:p>
@@ -921,7 +921,7 @@
           </a:lstStyle>
           <a:p>
             <a:r>
-              <a:rPr lang="en-US" altLang="zh-TW" smtClean="0"/>
+              <a:rPr lang="en-US" altLang="zh-TW"/>
               <a:t>Click to edit Master title style</a:t>
             </a:r>
             <a:endParaRPr lang="zh-TW" altLang="en-US"/>
@@ -1041,7 +1041,7 @@
           <a:p>
             <a:pPr lvl="0"/>
             <a:r>
-              <a:rPr lang="en-US" altLang="zh-TW" smtClean="0"/>
+              <a:rPr lang="en-US" altLang="zh-TW"/>
               <a:t>Edit Master text styles</a:t>
             </a:r>
           </a:p>
@@ -1064,7 +1064,7 @@
           <a:p>
             <a:fld id="{2E7B2A7A-7F65-47EC-8A58-D22006E8A9BC}" type="datetimeFigureOut">
               <a:rPr lang="vi-VN" smtClean="0"/>
-              <a:t>03/09/2022</a:t>
+              <a:t>14/02/2026</a:t>
             </a:fld>
             <a:endParaRPr lang="vi-VN"/>
           </a:p>
@@ -1158,7 +1158,7 @@
           <a:lstStyle/>
           <a:p>
             <a:r>
-              <a:rPr lang="en-US" altLang="zh-TW" smtClean="0"/>
+              <a:rPr lang="en-US" altLang="zh-TW"/>
               <a:t>Click to edit Master title style</a:t>
             </a:r>
             <a:endParaRPr lang="zh-TW" altLang="en-US"/>
@@ -1215,35 +1215,35 @@
           <a:p>
             <a:pPr lvl="0"/>
             <a:r>
-              <a:rPr lang="en-US" altLang="zh-TW" smtClean="0"/>
+              <a:rPr lang="en-US" altLang="zh-TW"/>
               <a:t>Edit Master text styles</a:t>
             </a:r>
           </a:p>
           <a:p>
             <a:pPr lvl="1"/>
             <a:r>
-              <a:rPr lang="en-US" altLang="zh-TW" smtClean="0"/>
+              <a:rPr lang="en-US" altLang="zh-TW"/>
               <a:t>Second level</a:t>
             </a:r>
           </a:p>
           <a:p>
             <a:pPr lvl="2"/>
             <a:r>
-              <a:rPr lang="en-US" altLang="zh-TW" smtClean="0"/>
+              <a:rPr lang="en-US" altLang="zh-TW"/>
               <a:t>Third level</a:t>
             </a:r>
           </a:p>
           <a:p>
             <a:pPr lvl="3"/>
             <a:r>
-              <a:rPr lang="en-US" altLang="zh-TW" smtClean="0"/>
+              <a:rPr lang="en-US" altLang="zh-TW"/>
               <a:t>Fourth level</a:t>
             </a:r>
           </a:p>
           <a:p>
             <a:pPr lvl="4"/>
             <a:r>
-              <a:rPr lang="en-US" altLang="zh-TW" smtClean="0"/>
+              <a:rPr lang="en-US" altLang="zh-TW"/>
               <a:t>Fifth level</a:t>
             </a:r>
             <a:endParaRPr lang="zh-TW" altLang="en-US"/>
@@ -1300,35 +1300,35 @@
           <a:p>
             <a:pPr lvl="0"/>
             <a:r>
-              <a:rPr lang="en-US" altLang="zh-TW" smtClean="0"/>
+              <a:rPr lang="en-US" altLang="zh-TW"/>
               <a:t>Edit Master text styles</a:t>
             </a:r>
           </a:p>
           <a:p>
             <a:pPr lvl="1"/>
             <a:r>
-              <a:rPr lang="en-US" altLang="zh-TW" smtClean="0"/>
+              <a:rPr lang="en-US" altLang="zh-TW"/>
               <a:t>Second level</a:t>
             </a:r>
           </a:p>
           <a:p>
             <a:pPr lvl="2"/>
             <a:r>
-              <a:rPr lang="en-US" altLang="zh-TW" smtClean="0"/>
+              <a:rPr lang="en-US" altLang="zh-TW"/>
               <a:t>Third level</a:t>
             </a:r>
           </a:p>
           <a:p>
             <a:pPr lvl="3"/>
             <a:r>
-              <a:rPr lang="en-US" altLang="zh-TW" smtClean="0"/>
+              <a:rPr lang="en-US" altLang="zh-TW"/>
               <a:t>Fourth level</a:t>
             </a:r>
           </a:p>
           <a:p>
             <a:pPr lvl="4"/>
             <a:r>
-              <a:rPr lang="en-US" altLang="zh-TW" smtClean="0"/>
+              <a:rPr lang="en-US" altLang="zh-TW"/>
               <a:t>Fifth level</a:t>
             </a:r>
             <a:endParaRPr lang="zh-TW" altLang="en-US"/>
@@ -1352,7 +1352,7 @@
           <a:p>
             <a:fld id="{2E7B2A7A-7F65-47EC-8A58-D22006E8A9BC}" type="datetimeFigureOut">
               <a:rPr lang="vi-VN" smtClean="0"/>
-              <a:t>03/09/2022</a:t>
+              <a:t>14/02/2026</a:t>
             </a:fld>
             <a:endParaRPr lang="vi-VN"/>
           </a:p>
@@ -1450,7 +1450,7 @@
           </a:lstStyle>
           <a:p>
             <a:r>
-              <a:rPr lang="en-US" altLang="zh-TW" smtClean="0"/>
+              <a:rPr lang="en-US" altLang="zh-TW"/>
               <a:t>Click to edit Master title style</a:t>
             </a:r>
             <a:endParaRPr lang="zh-TW" altLang="en-US"/>
@@ -1516,7 +1516,7 @@
           <a:p>
             <a:pPr lvl="0"/>
             <a:r>
-              <a:rPr lang="en-US" altLang="zh-TW" smtClean="0"/>
+              <a:rPr lang="en-US" altLang="zh-TW"/>
               <a:t>Edit Master text styles</a:t>
             </a:r>
           </a:p>
@@ -1572,35 +1572,35 @@
           <a:p>
             <a:pPr lvl="0"/>
             <a:r>
-              <a:rPr lang="en-US" altLang="zh-TW" smtClean="0"/>
+              <a:rPr lang="en-US" altLang="zh-TW"/>
               <a:t>Edit Master text styles</a:t>
             </a:r>
           </a:p>
           <a:p>
             <a:pPr lvl="1"/>
             <a:r>
-              <a:rPr lang="en-US" altLang="zh-TW" smtClean="0"/>
+              <a:rPr lang="en-US" altLang="zh-TW"/>
               <a:t>Second level</a:t>
             </a:r>
           </a:p>
           <a:p>
             <a:pPr lvl="2"/>
             <a:r>
-              <a:rPr lang="en-US" altLang="zh-TW" smtClean="0"/>
+              <a:rPr lang="en-US" altLang="zh-TW"/>
               <a:t>Third level</a:t>
             </a:r>
           </a:p>
           <a:p>
             <a:pPr lvl="3"/>
             <a:r>
-              <a:rPr lang="en-US" altLang="zh-TW" smtClean="0"/>
+              <a:rPr lang="en-US" altLang="zh-TW"/>
               <a:t>Fourth level</a:t>
             </a:r>
           </a:p>
           <a:p>
             <a:pPr lvl="4"/>
             <a:r>
-              <a:rPr lang="en-US" altLang="zh-TW" smtClean="0"/>
+              <a:rPr lang="en-US" altLang="zh-TW"/>
               <a:t>Fifth level</a:t>
             </a:r>
             <a:endParaRPr lang="zh-TW" altLang="en-US"/>
@@ -1666,7 +1666,7 @@
           <a:p>
             <a:pPr lvl="0"/>
             <a:r>
-              <a:rPr lang="en-US" altLang="zh-TW" smtClean="0"/>
+              <a:rPr lang="en-US" altLang="zh-TW"/>
               <a:t>Edit Master text styles</a:t>
             </a:r>
           </a:p>
@@ -1722,35 +1722,35 @@
           <a:p>
             <a:pPr lvl="0"/>
             <a:r>
-              <a:rPr lang="en-US" altLang="zh-TW" smtClean="0"/>
+              <a:rPr lang="en-US" altLang="zh-TW"/>
               <a:t>Edit Master text styles</a:t>
             </a:r>
           </a:p>
           <a:p>
             <a:pPr lvl="1"/>
             <a:r>
-              <a:rPr lang="en-US" altLang="zh-TW" smtClean="0"/>
+              <a:rPr lang="en-US" altLang="zh-TW"/>
               <a:t>Second level</a:t>
             </a:r>
           </a:p>
           <a:p>
             <a:pPr lvl="2"/>
             <a:r>
-              <a:rPr lang="en-US" altLang="zh-TW" smtClean="0"/>
+              <a:rPr lang="en-US" altLang="zh-TW"/>
               <a:t>Third level</a:t>
             </a:r>
           </a:p>
           <a:p>
             <a:pPr lvl="3"/>
             <a:r>
-              <a:rPr lang="en-US" altLang="zh-TW" smtClean="0"/>
+              <a:rPr lang="en-US" altLang="zh-TW"/>
               <a:t>Fourth level</a:t>
             </a:r>
           </a:p>
           <a:p>
             <a:pPr lvl="4"/>
             <a:r>
-              <a:rPr lang="en-US" altLang="zh-TW" smtClean="0"/>
+              <a:rPr lang="en-US" altLang="zh-TW"/>
               <a:t>Fifth level</a:t>
             </a:r>
             <a:endParaRPr lang="zh-TW" altLang="en-US"/>
@@ -1774,7 +1774,7 @@
           <a:p>
             <a:fld id="{2E7B2A7A-7F65-47EC-8A58-D22006E8A9BC}" type="datetimeFigureOut">
               <a:rPr lang="vi-VN" smtClean="0"/>
-              <a:t>03/09/2022</a:t>
+              <a:t>14/02/2026</a:t>
             </a:fld>
             <a:endParaRPr lang="vi-VN"/>
           </a:p>
@@ -1868,7 +1868,7 @@
           <a:lstStyle/>
           <a:p>
             <a:r>
-              <a:rPr lang="en-US" altLang="zh-TW" smtClean="0"/>
+              <a:rPr lang="en-US" altLang="zh-TW"/>
               <a:t>Click to edit Master title style</a:t>
             </a:r>
             <a:endParaRPr lang="zh-TW" altLang="en-US"/>
@@ -1892,7 +1892,7 @@
           <a:p>
             <a:fld id="{2E7B2A7A-7F65-47EC-8A58-D22006E8A9BC}" type="datetimeFigureOut">
               <a:rPr lang="vi-VN" smtClean="0"/>
-              <a:t>03/09/2022</a:t>
+              <a:t>14/02/2026</a:t>
             </a:fld>
             <a:endParaRPr lang="vi-VN"/>
           </a:p>
@@ -1987,7 +1987,7 @@
           <a:p>
             <a:fld id="{2E7B2A7A-7F65-47EC-8A58-D22006E8A9BC}" type="datetimeFigureOut">
               <a:rPr lang="vi-VN" smtClean="0"/>
-              <a:t>03/09/2022</a:t>
+              <a:t>14/02/2026</a:t>
             </a:fld>
             <a:endParaRPr lang="vi-VN"/>
           </a:p>
@@ -2090,7 +2090,7 @@
           </a:lstStyle>
           <a:p>
             <a:r>
-              <a:rPr lang="en-US" altLang="zh-TW" smtClean="0"/>
+              <a:rPr lang="en-US" altLang="zh-TW"/>
               <a:t>Click to edit Master title style</a:t>
             </a:r>
             <a:endParaRPr lang="zh-TW" altLang="en-US"/>
@@ -2147,35 +2147,35 @@
           <a:p>
             <a:pPr lvl="0"/>
             <a:r>
-              <a:rPr lang="en-US" altLang="zh-TW" smtClean="0"/>
+              <a:rPr lang="en-US" altLang="zh-TW"/>
               <a:t>Edit Master text styles</a:t>
             </a:r>
           </a:p>
           <a:p>
             <a:pPr lvl="1"/>
             <a:r>
-              <a:rPr lang="en-US" altLang="zh-TW" smtClean="0"/>
+              <a:rPr lang="en-US" altLang="zh-TW"/>
               <a:t>Second level</a:t>
             </a:r>
           </a:p>
           <a:p>
             <a:pPr lvl="2"/>
             <a:r>
-              <a:rPr lang="en-US" altLang="zh-TW" smtClean="0"/>
+              <a:rPr lang="en-US" altLang="zh-TW"/>
               <a:t>Third level</a:t>
             </a:r>
           </a:p>
           <a:p>
             <a:pPr lvl="3"/>
             <a:r>
-              <a:rPr lang="en-US" altLang="zh-TW" smtClean="0"/>
+              <a:rPr lang="en-US" altLang="zh-TW"/>
               <a:t>Fourth level</a:t>
             </a:r>
           </a:p>
           <a:p>
             <a:pPr lvl="4"/>
             <a:r>
-              <a:rPr lang="en-US" altLang="zh-TW" smtClean="0"/>
+              <a:rPr lang="en-US" altLang="zh-TW"/>
               <a:t>Fifth level</a:t>
             </a:r>
             <a:endParaRPr lang="zh-TW" altLang="en-US"/>
@@ -2241,7 +2241,7 @@
           <a:p>
             <a:pPr lvl="0"/>
             <a:r>
-              <a:rPr lang="en-US" altLang="zh-TW" smtClean="0"/>
+              <a:rPr lang="en-US" altLang="zh-TW"/>
               <a:t>Edit Master text styles</a:t>
             </a:r>
           </a:p>
@@ -2264,7 +2264,7 @@
           <a:p>
             <a:fld id="{2E7B2A7A-7F65-47EC-8A58-D22006E8A9BC}" type="datetimeFigureOut">
               <a:rPr lang="vi-VN" smtClean="0"/>
-              <a:t>03/09/2022</a:t>
+              <a:t>14/02/2026</a:t>
             </a:fld>
             <a:endParaRPr lang="vi-VN"/>
           </a:p>
@@ -2367,7 +2367,7 @@
           </a:lstStyle>
           <a:p>
             <a:r>
-              <a:rPr lang="en-US" altLang="zh-TW" smtClean="0"/>
+              <a:rPr lang="en-US" altLang="zh-TW"/>
               <a:t>Click to edit Master title style</a:t>
             </a:r>
             <a:endParaRPr lang="zh-TW" altLang="en-US"/>
@@ -2432,7 +2432,7 @@
           </a:lstStyle>
           <a:p>
             <a:r>
-              <a:rPr lang="en-US" altLang="zh-TW" smtClean="0"/>
+              <a:rPr lang="en-US" altLang="zh-TW"/>
               <a:t>Click icon to add picture</a:t>
             </a:r>
             <a:endParaRPr lang="zh-TW" altLang="en-US"/>
@@ -2498,7 +2498,7 @@
           <a:p>
             <a:pPr lvl="0"/>
             <a:r>
-              <a:rPr lang="en-US" altLang="zh-TW" smtClean="0"/>
+              <a:rPr lang="en-US" altLang="zh-TW"/>
               <a:t>Edit Master text styles</a:t>
             </a:r>
           </a:p>
@@ -2521,7 +2521,7 @@
           <a:p>
             <a:fld id="{2E7B2A7A-7F65-47EC-8A58-D22006E8A9BC}" type="datetimeFigureOut">
               <a:rPr lang="vi-VN" smtClean="0"/>
-              <a:t>03/09/2022</a:t>
+              <a:t>14/02/2026</a:t>
             </a:fld>
             <a:endParaRPr lang="vi-VN"/>
           </a:p>
@@ -2635,10 +2635,9 @@
           <a:lstStyle/>
           <a:p>
             <a:r>
-              <a:rPr lang="zh-TW" altLang="en-US" smtClean="0"/>
+              <a:rPr lang="zh-TW" altLang="en-US"/>
               <a:t>按一下以編輯母片標題樣式</a:t>
             </a:r>
-            <a:endParaRPr lang="zh-TW" altLang="en-US"/>
           </a:p>
         </p:txBody>
       </p:sp>
@@ -2669,38 +2668,37 @@
           <a:p>
             <a:pPr lvl="0"/>
             <a:r>
-              <a:rPr lang="zh-TW" altLang="en-US" smtClean="0"/>
+              <a:rPr lang="zh-TW" altLang="en-US"/>
               <a:t>按一下以編輯母片文字樣式</a:t>
             </a:r>
           </a:p>
           <a:p>
             <a:pPr lvl="1"/>
             <a:r>
-              <a:rPr lang="zh-TW" altLang="en-US" smtClean="0"/>
+              <a:rPr lang="zh-TW" altLang="en-US"/>
               <a:t>第二層</a:t>
             </a:r>
           </a:p>
           <a:p>
             <a:pPr lvl="2"/>
             <a:r>
-              <a:rPr lang="zh-TW" altLang="en-US" smtClean="0"/>
+              <a:rPr lang="zh-TW" altLang="en-US"/>
               <a:t>第三層</a:t>
             </a:r>
           </a:p>
           <a:p>
             <a:pPr lvl="3"/>
             <a:r>
-              <a:rPr lang="zh-TW" altLang="en-US" smtClean="0"/>
+              <a:rPr lang="zh-TW" altLang="en-US"/>
               <a:t>第四層</a:t>
             </a:r>
           </a:p>
           <a:p>
             <a:pPr lvl="4"/>
             <a:r>
-              <a:rPr lang="zh-TW" altLang="en-US" smtClean="0"/>
+              <a:rPr lang="zh-TW" altLang="en-US"/>
               <a:t>第五層</a:t>
             </a:r>
-            <a:endParaRPr lang="zh-TW" altLang="en-US"/>
           </a:p>
         </p:txBody>
       </p:sp>
@@ -2739,7 +2737,7 @@
           <a:p>
             <a:fld id="{2E7B2A7A-7F65-47EC-8A58-D22006E8A9BC}" type="datetimeFigureOut">
               <a:rPr lang="vi-VN" smtClean="0"/>
-              <a:t>03/09/2022</a:t>
+              <a:t>14/02/2026</a:t>
             </a:fld>
             <a:endParaRPr lang="vi-VN"/>
           </a:p>
@@ -3137,7 +3135,7 @@
           <a:lstStyle/>
           <a:p>
             <a:r>
-              <a:rPr lang="zh-CN" altLang="en-US" sz="7200" b="1" i="1" dirty="0" smtClean="0">
+              <a:rPr lang="zh-CN" altLang="en-US" sz="7200" b="1" i="1" dirty="0">
                 <a:solidFill>
                   <a:srgbClr val="660033"/>
                 </a:solidFill>
@@ -3151,24 +3149,7 @@
                 <a:latin typeface="微軟正黑體" pitchFamily="34" charset="-120"/>
                 <a:ea typeface="微軟正黑體" pitchFamily="34" charset="-120"/>
               </a:rPr>
-              <a:t>耶</a:t>
-            </a:r>
-            <a:r>
-              <a:rPr lang="zh-CN" altLang="en-US" sz="7200" b="1" i="1" dirty="0">
-                <a:solidFill>
-                  <a:srgbClr val="660033"/>
-                </a:solidFill>
-                <a:effectLst>
-                  <a:outerShdw blurRad="38100" dist="38100" dir="2700000" algn="tl">
-                    <a:srgbClr val="000000">
-                      <a:alpha val="43137"/>
-                    </a:srgbClr>
-                  </a:outerShdw>
-                </a:effectLst>
-                <a:latin typeface="微軟正黑體" pitchFamily="34" charset="-120"/>
-                <a:ea typeface="微軟正黑體" pitchFamily="34" charset="-120"/>
-              </a:rPr>
-              <a:t>和華祝福滿滿</a:t>
+              <a:t>耶和華祝福滿滿</a:t>
             </a:r>
             <a:endParaRPr lang="zh-TW" altLang="en-US" sz="7200" b="1" i="1" dirty="0">
               <a:solidFill>
@@ -3243,54 +3224,14 @@
               <a:buNone/>
             </a:pPr>
             <a:r>
-              <a:rPr lang="zh-CN" altLang="en-US" sz="6400" b="1" dirty="0" smtClean="0">
+              <a:rPr lang="zh-CN" altLang="en-US" sz="6400" b="1" dirty="0">
                 <a:solidFill>
                   <a:srgbClr val="660033"/>
                 </a:solidFill>
                 <a:latin typeface="微軟正黑體" pitchFamily="34" charset="-120"/>
                 <a:ea typeface="微軟正黑體" pitchFamily="34" charset="-120"/>
               </a:rPr>
-              <a:t>田中</a:t>
-            </a:r>
-            <a:r>
-              <a:rPr lang="zh-CN" altLang="en-US" sz="6400" b="1" dirty="0">
-                <a:solidFill>
-                  <a:srgbClr val="660033"/>
-                </a:solidFill>
-                <a:latin typeface="微軟正黑體" pitchFamily="34" charset="-120"/>
-                <a:ea typeface="微軟正黑體" pitchFamily="34" charset="-120"/>
-              </a:rPr>
-              <a:t>的白鷺</a:t>
-            </a:r>
-            <a:r>
-              <a:rPr lang="zh-CN" altLang="en-US" sz="6400" b="1" dirty="0" smtClean="0">
-                <a:solidFill>
-                  <a:srgbClr val="660033"/>
-                </a:solidFill>
-                <a:latin typeface="微軟正黑體" pitchFamily="34" charset="-120"/>
-                <a:ea typeface="微軟正黑體" pitchFamily="34" charset="-120"/>
-              </a:rPr>
-              <a:t>絲  無</a:t>
-            </a:r>
-            <a:r>
-              <a:rPr lang="zh-CN" altLang="en-US" sz="6400" b="1" dirty="0">
-                <a:solidFill>
-                  <a:srgbClr val="660033"/>
-                </a:solidFill>
-                <a:latin typeface="微軟正黑體" pitchFamily="34" charset="-120"/>
-                <a:ea typeface="微軟正黑體" pitchFamily="34" charset="-120"/>
-              </a:rPr>
-              <a:t>欠缺什</a:t>
-            </a:r>
-            <a:r>
-              <a:rPr lang="zh-CN" altLang="en-US" sz="6400" b="1" dirty="0" smtClean="0">
-                <a:solidFill>
-                  <a:srgbClr val="660033"/>
-                </a:solidFill>
-                <a:latin typeface="微軟正黑體" pitchFamily="34" charset="-120"/>
-                <a:ea typeface="微軟正黑體" pitchFamily="34" charset="-120"/>
-              </a:rPr>
-              <a:t>麼</a:t>
+              <a:t>田中的白鷺絲  無欠缺什麼</a:t>
             </a:r>
             <a:endParaRPr lang="vi-VN" sz="6400" b="1" dirty="0">
               <a:solidFill>
@@ -3312,27 +3253,7 @@
                 <a:latin typeface="微軟正黑體" pitchFamily="34" charset="-120"/>
                 <a:ea typeface="微軟正黑體" pitchFamily="34" charset="-120"/>
               </a:rPr>
-              <a:t>山頂的百合</a:t>
-            </a:r>
-            <a:r>
-              <a:rPr lang="zh-CN" altLang="en-US" sz="6400" b="1" dirty="0" smtClean="0">
-                <a:solidFill>
-                  <a:srgbClr val="660033"/>
-                </a:solidFill>
-                <a:latin typeface="微軟正黑體" pitchFamily="34" charset="-120"/>
-                <a:ea typeface="微軟正黑體" pitchFamily="34" charset="-120"/>
-              </a:rPr>
-              <a:t>花  春</a:t>
-            </a:r>
-            <a:r>
-              <a:rPr lang="zh-CN" altLang="en-US" sz="6400" b="1" dirty="0">
-                <a:solidFill>
-                  <a:srgbClr val="660033"/>
-                </a:solidFill>
-                <a:latin typeface="微軟正黑體" pitchFamily="34" charset="-120"/>
-                <a:ea typeface="微軟正黑體" pitchFamily="34" charset="-120"/>
-              </a:rPr>
-              <a:t>天現香味</a:t>
+              <a:t>山頂的百合花  春天現香味</a:t>
             </a:r>
             <a:endParaRPr lang="en-US" altLang="zh-TW" sz="6400" b="1" dirty="0">
               <a:solidFill>
@@ -3378,34 +3299,24 @@
               <a:t>( </a:t>
             </a:r>
             <a:r>
-              <a:rPr lang="zh-CN" altLang="en-US" sz="4267" b="1" dirty="0" smtClean="0">
+              <a:rPr lang="zh-CN" altLang="en-US" sz="4267" b="1" dirty="0">
                 <a:solidFill>
                   <a:srgbClr val="660033"/>
                 </a:solidFill>
                 <a:latin typeface="Microsoft JhengHei" panose="020B0604030504040204" pitchFamily="34" charset="-120"/>
                 <a:ea typeface="Microsoft JhengHei" panose="020B0604030504040204" pitchFamily="34" charset="-120"/>
               </a:rPr>
-              <a:t>正</a:t>
-            </a:r>
-            <a:r>
-              <a:rPr lang="en-US" sz="4267" b="1" dirty="0" smtClean="0">
+              <a:t>正歌</a:t>
+            </a:r>
+            <a:r>
+              <a:rPr lang="en-US" sz="4267" b="1" dirty="0">
                 <a:solidFill>
                   <a:srgbClr val="660033"/>
                 </a:solidFill>
                 <a:latin typeface="Microsoft JhengHei" panose="020B0604030504040204" pitchFamily="34" charset="-120"/>
                 <a:ea typeface="Microsoft JhengHei" panose="020B0604030504040204" pitchFamily="34" charset="-120"/>
               </a:rPr>
-              <a:t> </a:t>
-            </a:r>
-            <a:r>
-              <a:rPr lang="en-US" sz="4267" b="1" dirty="0">
-                <a:solidFill>
-                  <a:srgbClr val="660033"/>
-                </a:solidFill>
-                <a:latin typeface="Microsoft JhengHei" panose="020B0604030504040204" pitchFamily="34" charset="-120"/>
-                <a:ea typeface="Microsoft JhengHei" panose="020B0604030504040204" pitchFamily="34" charset="-120"/>
-              </a:rPr>
-              <a:t>)</a:t>
+              <a:t> )</a:t>
             </a:r>
             <a:endParaRPr lang="vi-VN" sz="4267" b="1" dirty="0">
               <a:solidFill>
@@ -3479,17 +3390,7 @@
                 <a:latin typeface="微軟正黑體" pitchFamily="34" charset="-120"/>
                 <a:ea typeface="微軟正黑體" pitchFamily="34" charset="-120"/>
               </a:rPr>
-              <a:t>總是全能的上</a:t>
-            </a:r>
-            <a:r>
-              <a:rPr lang="zh-CN" altLang="en-US" sz="6400" b="1" dirty="0">
-                <a:solidFill>
-                  <a:srgbClr val="660033"/>
-                </a:solidFill>
-                <a:latin typeface="微軟正黑體" pitchFamily="34" charset="-120"/>
-                <a:ea typeface="微軟正黑體" pitchFamily="34" charset="-120"/>
-              </a:rPr>
-              <a:t>帝</a:t>
+              <a:t>總是全能的上帝</a:t>
             </a:r>
             <a:endParaRPr lang="en-US" altLang="zh-CN" sz="6400" b="1" dirty="0">
               <a:solidFill>
@@ -3511,17 +3412,7 @@
                 <a:latin typeface="微軟正黑體" pitchFamily="34" charset="-120"/>
                 <a:ea typeface="微軟正黑體" pitchFamily="34" charset="-120"/>
               </a:rPr>
-              <a:t>每</a:t>
-            </a:r>
-            <a:r>
-              <a:rPr lang="zh-CN" altLang="en-US" sz="6400" b="1" dirty="0">
-                <a:solidFill>
-                  <a:srgbClr val="660033"/>
-                </a:solidFill>
-                <a:latin typeface="微軟正黑體" pitchFamily="34" charset="-120"/>
-                <a:ea typeface="微軟正黑體" pitchFamily="34" charset="-120"/>
-              </a:rPr>
-              <a:t>日賞賜真福氣</a:t>
+              <a:t>每日賞賜真福氣</a:t>
             </a:r>
             <a:endParaRPr lang="en-US" altLang="zh-TW" sz="6400" b="1" dirty="0">
               <a:solidFill>
@@ -3567,34 +3458,24 @@
               <a:t>( </a:t>
             </a:r>
             <a:r>
-              <a:rPr lang="zh-CN" altLang="en-US" sz="4267" b="1" dirty="0" smtClean="0">
+              <a:rPr lang="zh-CN" altLang="en-US" sz="4267" b="1" dirty="0">
                 <a:solidFill>
                   <a:srgbClr val="660033"/>
                 </a:solidFill>
                 <a:latin typeface="Microsoft JhengHei" panose="020B0604030504040204" pitchFamily="34" charset="-120"/>
                 <a:ea typeface="Microsoft JhengHei" panose="020B0604030504040204" pitchFamily="34" charset="-120"/>
               </a:rPr>
-              <a:t>正</a:t>
-            </a:r>
-            <a:r>
-              <a:rPr lang="en-US" sz="4267" b="1" dirty="0" smtClean="0">
+              <a:t>正歌</a:t>
+            </a:r>
+            <a:r>
+              <a:rPr lang="en-US" sz="4267" b="1" dirty="0">
                 <a:solidFill>
                   <a:srgbClr val="660033"/>
                 </a:solidFill>
                 <a:latin typeface="Microsoft JhengHei" panose="020B0604030504040204" pitchFamily="34" charset="-120"/>
                 <a:ea typeface="Microsoft JhengHei" panose="020B0604030504040204" pitchFamily="34" charset="-120"/>
               </a:rPr>
-              <a:t> </a:t>
-            </a:r>
-            <a:r>
-              <a:rPr lang="en-US" sz="4267" b="1" dirty="0">
-                <a:solidFill>
-                  <a:srgbClr val="660033"/>
-                </a:solidFill>
-                <a:latin typeface="Microsoft JhengHei" panose="020B0604030504040204" pitchFamily="34" charset="-120"/>
-                <a:ea typeface="Microsoft JhengHei" panose="020B0604030504040204" pitchFamily="34" charset="-120"/>
-              </a:rPr>
-              <a:t>)</a:t>
+              <a:t> )</a:t>
             </a:r>
             <a:endParaRPr lang="vi-VN" sz="4267" b="1" dirty="0">
               <a:solidFill>
@@ -3668,17 +3549,7 @@
                 <a:latin typeface="微軟正黑體" pitchFamily="34" charset="-120"/>
                 <a:ea typeface="微軟正黑體" pitchFamily="34" charset="-120"/>
               </a:rPr>
-              <a:t>使地上發</a:t>
-            </a:r>
-            <a:r>
-              <a:rPr lang="zh-CN" altLang="en-US" sz="6400" b="1" dirty="0">
-                <a:solidFill>
-                  <a:srgbClr val="660033"/>
-                </a:solidFill>
-                <a:latin typeface="微軟正黑體" pitchFamily="34" charset="-120"/>
-                <a:ea typeface="微軟正黑體" pitchFamily="34" charset="-120"/>
-              </a:rPr>
-              <a:t>芽  結實</a:t>
+              <a:t>使地上發芽  結實</a:t>
             </a:r>
             <a:endParaRPr lang="en-US" altLang="zh-CN" sz="6400" b="1" dirty="0">
               <a:solidFill>
@@ -3700,17 +3571,7 @@
                 <a:latin typeface="微軟正黑體" pitchFamily="34" charset="-120"/>
                 <a:ea typeface="微軟正黑體" pitchFamily="34" charset="-120"/>
               </a:rPr>
-              <a:t>顯</a:t>
-            </a:r>
-            <a:r>
-              <a:rPr lang="zh-CN" altLang="en-US" sz="6400" b="1" dirty="0">
-                <a:solidFill>
-                  <a:srgbClr val="660033"/>
-                </a:solidFill>
-                <a:latin typeface="微軟正黑體" pitchFamily="34" charset="-120"/>
-                <a:ea typeface="微軟正黑體" pitchFamily="34" charset="-120"/>
-              </a:rPr>
-              <a:t>出慈愛的根據</a:t>
+              <a:t>顯出慈愛的根據</a:t>
             </a:r>
             <a:endParaRPr lang="en-US" altLang="zh-TW" sz="6400" b="1" dirty="0">
               <a:solidFill>
@@ -3756,34 +3617,24 @@
               <a:t>( </a:t>
             </a:r>
             <a:r>
-              <a:rPr lang="zh-CN" altLang="en-US" sz="4267" b="1" dirty="0" smtClean="0">
+              <a:rPr lang="zh-CN" altLang="en-US" sz="4267" b="1" dirty="0">
                 <a:solidFill>
                   <a:srgbClr val="660033"/>
                 </a:solidFill>
                 <a:latin typeface="Microsoft JhengHei" panose="020B0604030504040204" pitchFamily="34" charset="-120"/>
                 <a:ea typeface="Microsoft JhengHei" panose="020B0604030504040204" pitchFamily="34" charset="-120"/>
               </a:rPr>
-              <a:t>正</a:t>
-            </a:r>
-            <a:r>
-              <a:rPr lang="en-US" sz="4267" b="1" dirty="0" smtClean="0">
+              <a:t>正歌</a:t>
+            </a:r>
+            <a:r>
+              <a:rPr lang="en-US" sz="4267" b="1" dirty="0">
                 <a:solidFill>
                   <a:srgbClr val="660033"/>
                 </a:solidFill>
                 <a:latin typeface="Microsoft JhengHei" panose="020B0604030504040204" pitchFamily="34" charset="-120"/>
                 <a:ea typeface="Microsoft JhengHei" panose="020B0604030504040204" pitchFamily="34" charset="-120"/>
               </a:rPr>
-              <a:t> </a:t>
-            </a:r>
-            <a:r>
-              <a:rPr lang="en-US" sz="4267" b="1" dirty="0">
-                <a:solidFill>
-                  <a:srgbClr val="660033"/>
-                </a:solidFill>
-                <a:latin typeface="Microsoft JhengHei" panose="020B0604030504040204" pitchFamily="34" charset="-120"/>
-                <a:ea typeface="Microsoft JhengHei" panose="020B0604030504040204" pitchFamily="34" charset="-120"/>
-              </a:rPr>
-              <a:t>)</a:t>
+              <a:t> )</a:t>
             </a:r>
             <a:endParaRPr lang="vi-VN" sz="4267" b="1" dirty="0">
               <a:solidFill>
@@ -3857,17 +3708,7 @@
                 <a:latin typeface="微軟正黑體" pitchFamily="34" charset="-120"/>
                 <a:ea typeface="微軟正黑體" pitchFamily="34" charset="-120"/>
               </a:rPr>
-              <a:t>耶和華祝福滿</a:t>
-            </a:r>
-            <a:r>
-              <a:rPr lang="zh-CN" altLang="en-US" sz="6400" b="1" dirty="0">
-                <a:solidFill>
-                  <a:srgbClr val="660033"/>
-                </a:solidFill>
-                <a:latin typeface="微軟正黑體" pitchFamily="34" charset="-120"/>
-                <a:ea typeface="微軟正黑體" pitchFamily="34" charset="-120"/>
-              </a:rPr>
-              <a:t>滿</a:t>
+              <a:t>耶和華祝福滿滿</a:t>
             </a:r>
             <a:r>
               <a:rPr lang="en-US" altLang="zh-CN" sz="6400" b="1" dirty="0">
@@ -3887,27 +3728,7 @@
                 <a:latin typeface="微軟正黑體" pitchFamily="34" charset="-120"/>
                 <a:ea typeface="微軟正黑體" pitchFamily="34" charset="-120"/>
               </a:rPr>
-              <a:t>親</a:t>
-            </a:r>
-            <a:r>
-              <a:rPr lang="zh-CN" altLang="en-US" sz="6400" b="1" dirty="0">
-                <a:solidFill>
-                  <a:srgbClr val="660033"/>
-                </a:solidFill>
-                <a:latin typeface="微軟正黑體" pitchFamily="34" charset="-120"/>
-                <a:ea typeface="微軟正黑體" pitchFamily="34" charset="-120"/>
-              </a:rPr>
-              <a:t>像海邊土</a:t>
-            </a:r>
-            <a:r>
-              <a:rPr lang="zh-CN" altLang="en-US" sz="6400" b="1" dirty="0">
-                <a:solidFill>
-                  <a:srgbClr val="660033"/>
-                </a:solidFill>
-                <a:latin typeface="微軟正黑體" pitchFamily="34" charset="-120"/>
-                <a:ea typeface="微軟正黑體" pitchFamily="34" charset="-120"/>
-              </a:rPr>
-              <a:t>沙</a:t>
+              <a:t>親像海邊土沙</a:t>
             </a:r>
             <a:endParaRPr lang="en-US" altLang="zh-CN" sz="6400" b="1" dirty="0">
               <a:solidFill>
@@ -3975,34 +3796,24 @@
               <a:t>( </a:t>
             </a:r>
             <a:r>
-              <a:rPr lang="zh-CN" altLang="en-US" sz="4267" b="1" dirty="0" smtClean="0">
+              <a:rPr lang="zh-CN" altLang="en-US" sz="4267" b="1" dirty="0">
                 <a:solidFill>
                   <a:srgbClr val="660033"/>
                 </a:solidFill>
                 <a:latin typeface="Microsoft JhengHei" panose="020B0604030504040204" pitchFamily="34" charset="-120"/>
                 <a:ea typeface="Microsoft JhengHei" panose="020B0604030504040204" pitchFamily="34" charset="-120"/>
               </a:rPr>
-              <a:t>副</a:t>
-            </a:r>
-            <a:r>
-              <a:rPr lang="en-US" sz="4267" b="1" dirty="0" smtClean="0">
+              <a:t>副歌</a:t>
+            </a:r>
+            <a:r>
+              <a:rPr lang="en-US" sz="4267" b="1" dirty="0">
                 <a:solidFill>
                   <a:srgbClr val="660033"/>
                 </a:solidFill>
                 <a:latin typeface="Microsoft JhengHei" panose="020B0604030504040204" pitchFamily="34" charset="-120"/>
                 <a:ea typeface="Microsoft JhengHei" panose="020B0604030504040204" pitchFamily="34" charset="-120"/>
               </a:rPr>
-              <a:t> </a:t>
-            </a:r>
-            <a:r>
-              <a:rPr lang="en-US" sz="4267" b="1" dirty="0">
-                <a:solidFill>
-                  <a:srgbClr val="660033"/>
-                </a:solidFill>
-                <a:latin typeface="Microsoft JhengHei" panose="020B0604030504040204" pitchFamily="34" charset="-120"/>
-                <a:ea typeface="Microsoft JhengHei" panose="020B0604030504040204" pitchFamily="34" charset="-120"/>
-              </a:rPr>
-              <a:t>)</a:t>
+              <a:t> )</a:t>
             </a:r>
             <a:endParaRPr lang="vi-VN" sz="4267" b="1" dirty="0">
               <a:solidFill>
@@ -4076,57 +3887,7 @@
                 <a:latin typeface="微軟正黑體" pitchFamily="34" charset="-120"/>
                 <a:ea typeface="微軟正黑體" pitchFamily="34" charset="-120"/>
               </a:rPr>
-              <a:t>我要舉手敬拜</a:t>
-            </a:r>
-            <a:r>
-              <a:rPr lang="zh-CN" altLang="en-US" sz="6400" b="1" dirty="0">
-                <a:solidFill>
-                  <a:srgbClr val="660033"/>
-                </a:solidFill>
-                <a:latin typeface="微軟正黑體" pitchFamily="34" charset="-120"/>
-                <a:ea typeface="微軟正黑體" pitchFamily="34" charset="-120"/>
-              </a:rPr>
-              <a:t>祂</a:t>
-            </a:r>
-            <a:r>
-              <a:rPr lang="zh-CN" altLang="en-US" sz="6400" b="1" dirty="0">
-                <a:solidFill>
-                  <a:srgbClr val="660033"/>
-                </a:solidFill>
-                <a:latin typeface="微軟正黑體" pitchFamily="34" charset="-120"/>
-                <a:ea typeface="微軟正黑體" pitchFamily="34" charset="-120"/>
-              </a:rPr>
-              <a:t> </a:t>
-            </a:r>
-            <a:r>
-              <a:rPr lang="zh-CN" altLang="en-US" sz="6400" b="1" dirty="0">
-                <a:solidFill>
-                  <a:srgbClr val="660033"/>
-                </a:solidFill>
-                <a:latin typeface="微軟正黑體" pitchFamily="34" charset="-120"/>
-                <a:ea typeface="微軟正黑體" pitchFamily="34" charset="-120"/>
-              </a:rPr>
-              <a:t> 唱</a:t>
-            </a:r>
-            <a:r>
-              <a:rPr lang="zh-CN" altLang="en-US" sz="6400" b="1" dirty="0">
-                <a:solidFill>
-                  <a:srgbClr val="660033"/>
-                </a:solidFill>
-                <a:latin typeface="微軟正黑體" pitchFamily="34" charset="-120"/>
-                <a:ea typeface="微軟正黑體" pitchFamily="34" charset="-120"/>
-              </a:rPr>
-              <a:t>出歡喜的歌</a:t>
-            </a:r>
-            <a:r>
-              <a:rPr lang="zh-CN" altLang="en-US" sz="6400" b="1" dirty="0">
-                <a:solidFill>
-                  <a:srgbClr val="660033"/>
-                </a:solidFill>
-                <a:latin typeface="微軟正黑體" pitchFamily="34" charset="-120"/>
-                <a:ea typeface="微軟正黑體" pitchFamily="34" charset="-120"/>
-              </a:rPr>
-              <a:t>聲</a:t>
+              <a:t>我要舉手敬拜祂  唱出歡喜的歌聲</a:t>
             </a:r>
             <a:endParaRPr lang="en-US" altLang="zh-CN" sz="6400" b="1" dirty="0">
               <a:solidFill>
@@ -4148,17 +3909,7 @@
                 <a:latin typeface="微軟正黑體" pitchFamily="34" charset="-120"/>
                 <a:ea typeface="微軟正黑體" pitchFamily="34" charset="-120"/>
               </a:rPr>
-              <a:t>讚</a:t>
-            </a:r>
-            <a:r>
-              <a:rPr lang="zh-CN" altLang="en-US" sz="6400" b="1" dirty="0">
-                <a:solidFill>
-                  <a:srgbClr val="660033"/>
-                </a:solidFill>
-                <a:latin typeface="微軟正黑體" pitchFamily="34" charset="-120"/>
-                <a:ea typeface="微軟正黑體" pitchFamily="34" charset="-120"/>
-              </a:rPr>
-              <a:t>美稱頌祂名永不息</a:t>
+              <a:t>讚美稱頌祂名永不息</a:t>
             </a:r>
             <a:endParaRPr lang="en-US" altLang="zh-TW" sz="6400" b="1" dirty="0">
               <a:solidFill>
@@ -4204,34 +3955,24 @@
               <a:t>( </a:t>
             </a:r>
             <a:r>
-              <a:rPr lang="zh-CN" altLang="en-US" sz="4267" b="1" dirty="0" smtClean="0">
+              <a:rPr lang="zh-CN" altLang="en-US" sz="4267" b="1" dirty="0">
                 <a:solidFill>
                   <a:srgbClr val="660033"/>
                 </a:solidFill>
                 <a:latin typeface="Microsoft JhengHei" panose="020B0604030504040204" pitchFamily="34" charset="-120"/>
                 <a:ea typeface="Microsoft JhengHei" panose="020B0604030504040204" pitchFamily="34" charset="-120"/>
               </a:rPr>
-              <a:t>副</a:t>
-            </a:r>
-            <a:r>
-              <a:rPr lang="en-US" sz="4267" b="1" dirty="0" smtClean="0">
+              <a:t>副歌</a:t>
+            </a:r>
+            <a:r>
+              <a:rPr lang="en-US" sz="4267" b="1" dirty="0">
                 <a:solidFill>
                   <a:srgbClr val="660033"/>
                 </a:solidFill>
                 <a:latin typeface="Microsoft JhengHei" panose="020B0604030504040204" pitchFamily="34" charset="-120"/>
                 <a:ea typeface="Microsoft JhengHei" panose="020B0604030504040204" pitchFamily="34" charset="-120"/>
               </a:rPr>
-              <a:t> </a:t>
-            </a:r>
-            <a:r>
-              <a:rPr lang="en-US" sz="4267" b="1" dirty="0">
-                <a:solidFill>
-                  <a:srgbClr val="660033"/>
-                </a:solidFill>
-                <a:latin typeface="Microsoft JhengHei" panose="020B0604030504040204" pitchFamily="34" charset="-120"/>
-                <a:ea typeface="Microsoft JhengHei" panose="020B0604030504040204" pitchFamily="34" charset="-120"/>
-              </a:rPr>
-              <a:t>)</a:t>
+              <a:t> )</a:t>
             </a:r>
             <a:endParaRPr lang="vi-VN" sz="4267" b="1" dirty="0">
               <a:solidFill>
